--- a/presentation/Small-Africa-Client-Pitch.pptx
+++ b/presentation/Small-Africa-Client-Pitch.pptx
@@ -150,7 +150,7 @@
   <p:extLst>
     <p:ext uri="{521415D9-36F7-43E2-AB2F-B90AF26B5E84}">
       <p14:sectionLst xmlns:p14="http://schemas.microsoft.com/office/powerpoint/2010/main">
-        <p14:section name="Introduction" id="{A9185756-2346-297A-FD4F-8314D7172B9F}">
+        <p14:section name="Introduction" id="{37289F63-D204-2F05-3C79-54B41AEE60A5}">
           <p14:sldIdLst>
             <p14:sldId id="256"/>
             <p14:sldId id="257"/>
@@ -158,7 +158,7 @@
             <p14:sldId id="259"/>
           </p14:sldIdLst>
         </p14:section>
-        <p14:section name="The guest experience" id="{33434C11-9416-8A3D-9EB6-33046D348D1E}">
+        <p14:section name="The guest experience" id="{C504AA39-371B-AE74-681B-B305AB21DCA8}">
           <p14:sldIdLst>
             <p14:sldId id="260"/>
             <p14:sldId id="261"/>
@@ -168,21 +168,21 @@
             <p14:sldId id="265"/>
           </p14:sldIdLst>
         </p14:section>
-        <p14:section name="Running the restaurant" id="{2C4E0602-ADBB-027C-3CC9-F0DAF7DE7A92}">
+        <p14:section name="Running the restaurant" id="{1D42FF4A-DE1A-74D9-24D2-E4F37C47ADD8}">
           <p14:sldIdLst>
             <p14:sldId id="266"/>
             <p14:sldId id="267"/>
             <p14:sldId id="268"/>
           </p14:sldIdLst>
         </p14:section>
-        <p14:section name="Launch &amp; beyond" id="{051A14EE-7AD0-5F91-06B9-F985FB50D6D7}">
+        <p14:section name="Launch &amp; beyond" id="{56B39339-FE6D-00A6-6AD7-C2FDC9E70EB1}">
           <p14:sldIdLst>
             <p14:sldId id="269"/>
             <p14:sldId id="270"/>
             <p14:sldId id="271"/>
           </p14:sldIdLst>
         </p14:section>
-        <p14:section name="Close" id="{37017E3D-DDD5-BF6A-3313-838608467D3F}">
+        <p14:section name="Close" id="{78DC1F57-A119-24B0-682A-5B98007CED0A}">
           <p14:sldIdLst>
             <p14:sldId id="272"/>
             <p14:sldId id="273"/>
@@ -222,7 +222,7 @@
     </p:spTree>
     <p:extLst>
       <p:ext uri="{BB962C8B-B14F-4D97-AF65-F5344CB8AC3E}">
-        <p14:creationId xmlns:p14="http://schemas.microsoft.com/office/powerpoint/2010/main" val="3347466897"/>
+        <p14:creationId xmlns:p14="http://schemas.microsoft.com/office/powerpoint/2010/main" val="2897851871"/>
       </p:ext>
     </p:extLst>
   </p:cSld>
@@ -629,7 +629,7 @@
           <a:p>
             <a:r>
               <a:rPr lang="en-US" dirty="0"/>
-              <a:t>Reassure, don’t lecture. Card details never reach our server. Staff accounts use two-factor sign-in. Each role only sees what it needs, and the audit log records who changed what. Interest Account balances are calculated from ledgers that are never edited, only added to, and a reconcile check confirms every balance matches them. The code is covered by 310 automated tests. The privacy policy follows Nigeria’s Data Protection Act 2023.</a:t>
+              <a:t>Reassure, don’t lecture. Card details never reach our server. Staff accounts use two-factor sign-in. Each role only sees what it needs, and the audit log records who changed what. Interest Account balances are calculated from ledgers that are never edited, only added to, and a reconcile check confirms every balance matches them. The code is covered by 321 automated tests. The privacy policy follows Nigeria’s Data Protection Act 2023.</a:t>
             </a:r>
           </a:p>
         </p:txBody>
